--- a/public/fun/pack/pptx/birthdaypro/돌잔치프리미엄_48_사진중심_일렉트릭바이올렛.pptx
+++ b/public/fun/pack/pptx/birthdaypro/돌잔치프리미엄_48_사진중심_일렉트릭바이올렛.pptx
@@ -112,12 +112,12 @@
   <p:extLst>
     <p:ext uri="{521415D9-36F7-43E2-AB2F-B90AF26B5E84}">
       <p14:sectionLst xmlns:p14="http://schemas.microsoft.com/office/powerpoint/2010/main">
-        <p14:section name="시작" id="{D1CD1B91-2F51-4248-865D-89257D53CEEB}">
+        <p14:section name="시작" id="{C105A025-F15A-4648-945D-AD072F44F581}">
           <p14:sldIdLst>
             <p14:sldId id="256"/>
           </p14:sldIdLst>
         </p14:section>
-        <p14:section name="본문" id="{2C86C66F-0133-42E3-8E89-2FFA30BEE9C2}">
+        <p14:section name="본문" id="{51A6DE80-9A59-4E9C-8B3D-785C76676EFA}">
           <p14:sldIdLst>
             <p14:sldId id="257"/>
             <p14:sldId id="258"/>
@@ -125,7 +125,7 @@
             <p14:sldId id="260"/>
           </p14:sldIdLst>
         </p14:section>
-        <p14:section name="마무리" id="{6DD9E5D4-542D-4AC7-9622-3E773C65C9A1}">
+        <p14:section name="마무리" id="{40F215DC-5A94-4918-AE44-8F5DF69884AF}">
           <p14:sldIdLst>
             <p14:sldId id="261"/>
           </p14:sldIdLst>
@@ -2914,7 +2914,7 @@
             </a:lvl1pPr>
           </a:lstStyle>
           <a:p>
-            <a:fld id="{7BE4E151-0AD0-4C4F-BC84-9CE45851A9B9}" type="slidenum">
+            <a:fld id="{418305F5-B8EE-487B-AC36-492870D2522D}" type="slidenum">
               <a:rPr lang="en-US"/>
               <a:t>‹#›</a:t>
             </a:fld>
@@ -5108,7 +5108,7 @@
             </a:lvl1pPr>
           </a:lstStyle>
           <a:p>
-            <a:fld id="{41528AC7-F8A0-41B4-9EB7-32939C59D84E}" type="slidenum">
+            <a:fld id="{699829EC-682E-43DE-8B1D-D3E5E35B9272}" type="slidenum">
               <a:rPr lang="en-US"/>
               <a:t>‹#›</a:t>
             </a:fld>
@@ -5854,7 +5854,7 @@
             </a:lvl1pPr>
           </a:lstStyle>
           <a:p>
-            <a:fld id="{F3A83BC2-DCC1-4A90-AB11-5FAD4F197A66}" type="slidenum">
+            <a:fld id="{FD3F7919-4FEB-4BD4-8C79-2119CE581521}" type="slidenum">
               <a:rPr lang="en-US"/>
               <a:t>‹#›</a:t>
             </a:fld>
@@ -6717,7 +6717,7 @@
           <a:p>
             <a:r>
               <a:rPr lang="ko-KR"/>
-              <a:t>올해 찍은 사진 중 열두 장입니다</a:t>
+              <a:t>그동안 찍은 사진 중 열두 장입니다</a:t>
             </a:r>
           </a:p>
         </p:txBody>
@@ -6739,7 +6739,7 @@
           <a:p>
             <a:r>
               <a:rPr lang="ko-KR"/>
-              <a:t>아기 이름 · 0000. 00. 00</a:t>
+              <a:t>아기 이름 · 날짜 입력</a:t>
             </a:r>
           </a:p>
           <a:p>
@@ -6921,7 +6921,7 @@
           <a:bodyPr/>
           <a:lstStyle/>
           <a:p>
-            <a:fld id="{B5401346-E8AF-4489-87C6-FB7DFB614A3C}" type="slidenum">
+            <a:fld id="{C7835F1C-1080-4ED8-B599-08BFF65877BF}" type="slidenum">
               <a:rPr lang="en-US"/>
               <a:t>‹#›</a:t>
             </a:fld>
@@ -7681,7 +7681,7 @@
           <a:bodyPr/>
           <a:lstStyle/>
           <a:p>
-            <a:fld id="{5D5C0EB7-F1A1-47CB-9AE5-481D27F3C1CE}" type="slidenum">
+            <a:fld id="{4E614700-886A-4624-8491-550CED40C172}" type="slidenum">
               <a:rPr lang="en-US"/>
               <a:t>‹#›</a:t>
             </a:fld>
@@ -7791,7 +7791,7 @@
           <a:bodyPr/>
           <a:lstStyle/>
           <a:p>
-            <a:fld id="{ACB0973D-6D7B-44D2-A026-5A88AE92660F}" type="slidenum">
+            <a:fld id="{988BD5FF-BFB8-40C9-8F66-B6AD93FABE26}" type="slidenum">
               <a:rPr lang="en-US"/>
               <a:t>‹#›</a:t>
             </a:fld>
@@ -9192,7 +9192,7 @@
           <a:bodyPr/>
           <a:lstStyle/>
           <a:p>
-            <a:fld id="{ED7830F0-AB84-46DA-9403-1164B1D58A30}" type="slidenum">
+            <a:fld id="{1548DF33-BF58-4A81-B3BE-09EF59E39598}" type="slidenum">
               <a:rPr lang="en-US"/>
               <a:t>‹#›</a:t>
             </a:fld>
